--- a/public/fun/pack/pptx/reviewpro/보장점검양식프리미엄_20_사업장점검_피스타치오크림.pptx
+++ b/public/fun/pack/pptx/reviewpro/보장점검양식프리미엄_20_사업장점검_피스타치오크림.pptx
@@ -112,12 +112,12 @@
   <p:extLst>
     <p:ext uri="{521415D9-36F7-43E2-AB2F-B90AF26B5E84}">
       <p14:sectionLst xmlns:p14="http://schemas.microsoft.com/office/powerpoint/2010/main">
-        <p14:section name="시작" id="{D4249C9B-9E30-471F-8F7C-AD0853D83802}">
+        <p14:section name="시작" id="{2BFE8608-FABD-42A7-9035-4C46BDAA312D}">
           <p14:sldIdLst>
             <p14:sldId id="256"/>
           </p14:sldIdLst>
         </p14:section>
-        <p14:section name="본문" id="{C9DA61BA-8E01-40D1-BC71-44D5664EE2E7}">
+        <p14:section name="본문" id="{5C27B43B-CB2F-4220-A602-E3AF46E3CE94}">
           <p14:sldIdLst>
             <p14:sldId id="257"/>
             <p14:sldId id="258"/>
@@ -1563,7 +1563,7 @@
             </a:lvl1pPr>
           </a:lstStyle>
           <a:p>
-            <a:fld id="{2BFBDB33-0438-467D-AA42-4EA93DA74BF9}" type="slidenum">
+            <a:fld id="{0464B292-F2AE-4E74-8BAC-5A68B99867B0}" type="slidenum">
               <a:rPr lang="en-US"/>
               <a:t>‹#›</a:t>
             </a:fld>
@@ -2292,7 +2292,7 @@
             </a:lvl1pPr>
           </a:lstStyle>
           <a:p>
-            <a:fld id="{CB2230C2-9332-4601-A426-D2C5D84DD3D4}" type="slidenum">
+            <a:fld id="{32168BD3-297C-4F53-B354-9D5C70871D28}" type="slidenum">
               <a:rPr lang="en-US"/>
               <a:t>‹#›</a:t>
             </a:fld>
@@ -3041,7 +3041,7 @@
             </a:lvl1pPr>
           </a:lstStyle>
           <a:p>
-            <a:fld id="{B9AB3D84-00B8-451F-B959-3FAACE16F53A}" type="slidenum">
+            <a:fld id="{1F37C537-4F6B-4137-99CD-9311F33E1F8B}" type="slidenum">
               <a:rPr lang="en-US"/>
               <a:t>‹#›</a:t>
             </a:fld>
@@ -3926,7 +3926,7 @@
           <a:p>
             <a:r>
               <a:rPr lang="ko-KR"/>
-              <a:t>사업장 점검 · 0000. 00. 00</a:t>
+              <a:t>사업장 점검 · 날짜 입력</a:t>
             </a:r>
           </a:p>
           <a:p>
@@ -4039,7 +4039,7 @@
           <a:bodyPr/>
           <a:lstStyle/>
           <a:p>
-            <a:fld id="{6D6B5637-5BCE-4A45-90CD-A25E2CA4FE85}" type="slidenum">
+            <a:fld id="{7ADC2063-2996-4EF3-A44E-DC40699A5710}" type="slidenum">
               <a:rPr lang="en-US"/>
               <a:t>‹#›</a:t>
             </a:fld>
@@ -4577,7 +4577,7 @@
           <a:bodyPr/>
           <a:lstStyle/>
           <a:p>
-            <a:fld id="{C5EB514D-9B25-4496-BC81-990E330FE70E}" type="slidenum">
+            <a:fld id="{143B2CEC-D83A-479E-99DE-D7E72CB5C30C}" type="slidenum">
               <a:rPr lang="en-US"/>
               <a:t>‹#›</a:t>
             </a:fld>
@@ -6105,7 +6105,7 @@
           <a:bodyPr/>
           <a:lstStyle/>
           <a:p>
-            <a:fld id="{C3DF8439-6570-4B86-93B8-0DB711925D11}" type="slidenum">
+            <a:fld id="{42E84A84-6B6D-4D03-B60E-1AA133818BF7}" type="slidenum">
               <a:rPr lang="en-US"/>
               <a:t>‹#›</a:t>
             </a:fld>
@@ -7677,7 +7677,7 @@
           <a:bodyPr/>
           <a:lstStyle/>
           <a:p>
-            <a:fld id="{D8983D2B-F87D-436C-9981-57189A46F26A}" type="slidenum">
+            <a:fld id="{9C9EB42F-36B3-43A4-9D5F-ABAADEFE6CAB}" type="slidenum">
               <a:rPr lang="en-US"/>
               <a:t>‹#›</a:t>
             </a:fld>
@@ -8561,7 +8561,7 @@
           <a:bodyPr/>
           <a:lstStyle/>
           <a:p>
-            <a:fld id="{22BF4F28-6F0F-4A96-B51C-E71A2BCFC398}" type="slidenum">
+            <a:fld id="{52880B87-913C-44A7-BA7A-6A4ACB4CE8ED}" type="slidenum">
               <a:rPr lang="en-US"/>
               <a:t>‹#›</a:t>
             </a:fld>
